--- a/docs/RapidSegment_Business_Deck.pptx
+++ b/docs/RapidSegment_Business_Deck.pptx
@@ -128,7 +128,7 @@
 <file path=ppt/revisionInfo.xml><?xml version="1.0" encoding="utf-8"?>
 <p1510:revInfo xmlns:a="http://schemas.openxmlformats.org/drawingml/2006/main" xmlns:r="http://schemas.openxmlformats.org/officeDocument/2006/relationships" xmlns:p1510="http://schemas.microsoft.com/office/powerpoint/2015/10/main">
   <p1510:revLst>
-    <p1510:client id="{43694411-78DE-4877-BD18-E65BDC3EB0AD}" v="6" dt="2026-08-20T16:32:50.324"/>
+    <p1510:client id="{43694411-78DE-4877-BD18-E65BDC3EB0AD}" v="7" dt="2026-08-21T14:04:50.867"/>
   </p1510:revLst>
 </p1510:revInfo>
 </file>
@@ -138,10 +138,25 @@
   <pc:docChgLst>
     <pc:chgData name="BISHWARUP BISWAS" userId="b1b10b90cd7ae38c" providerId="LiveId" clId="{BE17FBC0-7DD6-4654-983B-69437D6DE70B}"/>
     <pc:docChg chg="undo custSel modSld sldOrd">
-      <pc:chgData name="BISHWARUP BISWAS" userId="b1b10b90cd7ae38c" providerId="LiveId" clId="{BE17FBC0-7DD6-4654-983B-69437D6DE70B}" dt="2026-08-20T16:43:20.682" v="132"/>
+      <pc:chgData name="BISHWARUP BISWAS" userId="b1b10b90cd7ae38c" providerId="LiveId" clId="{BE17FBC0-7DD6-4654-983B-69437D6DE70B}" dt="2026-08-21T14:05:35.015" v="274" actId="1076"/>
       <pc:docMkLst>
         <pc:docMk/>
       </pc:docMkLst>
+      <pc:sldChg chg="modSp mod">
+        <pc:chgData name="BISHWARUP BISWAS" userId="b1b10b90cd7ae38c" providerId="LiveId" clId="{BE17FBC0-7DD6-4654-983B-69437D6DE70B}" dt="2026-08-21T12:57:43.325" v="252" actId="20577"/>
+        <pc:sldMkLst>
+          <pc:docMk/>
+          <pc:sldMk cId="0" sldId="256"/>
+        </pc:sldMkLst>
+        <pc:spChg chg="mod">
+          <ac:chgData name="BISHWARUP BISWAS" userId="b1b10b90cd7ae38c" providerId="LiveId" clId="{BE17FBC0-7DD6-4654-983B-69437D6DE70B}" dt="2026-08-21T12:57:43.325" v="252" actId="20577"/>
+          <ac:spMkLst>
+            <pc:docMk/>
+            <pc:sldMk cId="0" sldId="256"/>
+            <ac:spMk id="4" creationId="{00000000-0000-0000-0000-000000000000}"/>
+          </ac:spMkLst>
+        </pc:spChg>
+      </pc:sldChg>
       <pc:sldChg chg="addSp delSp modSp mod">
         <pc:chgData name="BISHWARUP BISWAS" userId="b1b10b90cd7ae38c" providerId="LiveId" clId="{BE17FBC0-7DD6-4654-983B-69437D6DE70B}" dt="2026-08-20T16:29:07.657" v="43" actId="313"/>
         <pc:sldMkLst>
@@ -275,8 +290,8 @@
           </ac:spMkLst>
         </pc:spChg>
       </pc:sldChg>
-      <pc:sldChg chg="modSp mod">
-        <pc:chgData name="BISHWARUP BISWAS" userId="b1b10b90cd7ae38c" providerId="LiveId" clId="{BE17FBC0-7DD6-4654-983B-69437D6DE70B}" dt="2026-08-20T16:34:14.820" v="103" actId="108"/>
+      <pc:sldChg chg="addSp delSp modSp mod">
+        <pc:chgData name="BISHWARUP BISWAS" userId="b1b10b90cd7ae38c" providerId="LiveId" clId="{BE17FBC0-7DD6-4654-983B-69437D6DE70B}" dt="2026-08-21T14:05:35.015" v="274" actId="1076"/>
         <pc:sldMkLst>
           <pc:docMk/>
           <pc:sldMk cId="0" sldId="261"/>
@@ -289,12 +304,28 @@
             <ac:spMk id="5" creationId="{00000000-0000-0000-0000-000000000000}"/>
           </ac:spMkLst>
         </pc:spChg>
+        <pc:spChg chg="del mod">
+          <ac:chgData name="BISHWARUP BISWAS" userId="b1b10b90cd7ae38c" providerId="LiveId" clId="{BE17FBC0-7DD6-4654-983B-69437D6DE70B}" dt="2026-08-21T14:03:59.535" v="261" actId="478"/>
+          <ac:spMkLst>
+            <pc:docMk/>
+            <pc:sldMk cId="0" sldId="261"/>
+            <ac:spMk id="9" creationId="{00000000-0000-0000-0000-000000000000}"/>
+          </ac:spMkLst>
+        </pc:spChg>
         <pc:spChg chg="mod">
           <ac:chgData name="BISHWARUP BISWAS" userId="b1b10b90cd7ae38c" providerId="LiveId" clId="{BE17FBC0-7DD6-4654-983B-69437D6DE70B}" dt="2026-08-20T16:34:13.948" v="101" actId="108"/>
           <ac:spMkLst>
             <pc:docMk/>
             <pc:sldMk cId="0" sldId="261"/>
             <ac:spMk id="10" creationId="{00000000-0000-0000-0000-000000000000}"/>
+          </ac:spMkLst>
+        </pc:spChg>
+        <pc:spChg chg="del mod">
+          <ac:chgData name="BISHWARUP BISWAS" userId="b1b10b90cd7ae38c" providerId="LiveId" clId="{BE17FBC0-7DD6-4654-983B-69437D6DE70B}" dt="2026-08-21T14:04:01.909" v="262" actId="478"/>
+          <ac:spMkLst>
+            <pc:docMk/>
+            <pc:sldMk cId="0" sldId="261"/>
+            <ac:spMk id="14" creationId="{00000000-0000-0000-0000-000000000000}"/>
           </ac:spMkLst>
         </pc:spChg>
         <pc:spChg chg="mod">
@@ -305,6 +336,14 @@
             <ac:spMk id="15" creationId="{00000000-0000-0000-0000-000000000000}"/>
           </ac:spMkLst>
         </pc:spChg>
+        <pc:spChg chg="del mod">
+          <ac:chgData name="BISHWARUP BISWAS" userId="b1b10b90cd7ae38c" providerId="LiveId" clId="{BE17FBC0-7DD6-4654-983B-69437D6DE70B}" dt="2026-08-21T14:04:04.623" v="263" actId="478"/>
+          <ac:spMkLst>
+            <pc:docMk/>
+            <pc:sldMk cId="0" sldId="261"/>
+            <ac:spMk id="19" creationId="{00000000-0000-0000-0000-000000000000}"/>
+          </ac:spMkLst>
+        </pc:spChg>
         <pc:spChg chg="mod">
           <ac:chgData name="BISHWARUP BISWAS" userId="b1b10b90cd7ae38c" providerId="LiveId" clId="{BE17FBC0-7DD6-4654-983B-69437D6DE70B}" dt="2026-08-20T16:34:14.820" v="103" actId="108"/>
           <ac:spMkLst>
@@ -313,6 +352,30 @@
             <ac:spMk id="20" creationId="{00000000-0000-0000-0000-000000000000}"/>
           </ac:spMkLst>
         </pc:spChg>
+        <pc:picChg chg="add mod">
+          <ac:chgData name="BISHWARUP BISWAS" userId="b1b10b90cd7ae38c" providerId="LiveId" clId="{BE17FBC0-7DD6-4654-983B-69437D6DE70B}" dt="2026-08-21T14:05:20.007" v="270" actId="1076"/>
+          <ac:picMkLst>
+            <pc:docMk/>
+            <pc:sldMk cId="0" sldId="261"/>
+            <ac:picMk id="37" creationId="{72050600-8D5A-C653-1041-2AA744098F38}"/>
+          </ac:picMkLst>
+        </pc:picChg>
+        <pc:picChg chg="add mod">
+          <ac:chgData name="BISHWARUP BISWAS" userId="b1b10b90cd7ae38c" providerId="LiveId" clId="{BE17FBC0-7DD6-4654-983B-69437D6DE70B}" dt="2026-08-21T14:05:30.334" v="272" actId="1076"/>
+          <ac:picMkLst>
+            <pc:docMk/>
+            <pc:sldMk cId="0" sldId="261"/>
+            <ac:picMk id="39" creationId="{EB87832B-FDD5-FAF9-364A-178C6EBC56D8}"/>
+          </ac:picMkLst>
+        </pc:picChg>
+        <pc:picChg chg="add mod">
+          <ac:chgData name="BISHWARUP BISWAS" userId="b1b10b90cd7ae38c" providerId="LiveId" clId="{BE17FBC0-7DD6-4654-983B-69437D6DE70B}" dt="2026-08-21T14:05:35.015" v="274" actId="1076"/>
+          <ac:picMkLst>
+            <pc:docMk/>
+            <pc:sldMk cId="0" sldId="261"/>
+            <ac:picMk id="41" creationId="{83D2AF76-1CBC-2D73-5205-2BFE51B58BFC}"/>
+          </ac:picMkLst>
+        </pc:picChg>
       </pc:sldChg>
       <pc:sldChg chg="modSp mod">
         <pc:chgData name="BISHWARUP BISWAS" userId="b1b10b90cd7ae38c" providerId="LiveId" clId="{BE17FBC0-7DD6-4654-983B-69437D6DE70B}" dt="2026-08-20T16:34:19.955" v="107" actId="108"/>
@@ -2577,27 +2640,7 @@
                 <a:ea typeface="Arial" pitchFamily="34" charset="-122"/>
                 <a:cs typeface="Arial" pitchFamily="34" charset="-120"/>
               </a:rPr>
-              <a:t>How the Engine Discovers</a:t>
-            </a:r>
-            <a:endParaRPr lang="en-US" sz="3600" dirty="0"/>
-          </a:p>
-          <a:p>
-            <a:pPr marL="0" indent="0">
-              <a:lnSpc>
-                <a:spcPct val="105000"/>
-              </a:lnSpc>
-              <a:buNone/>
-            </a:pPr>
-            <a:r>
-              <a:rPr lang="en-US" sz="3600" b="1" dirty="0">
-                <a:solidFill>
-                  <a:srgbClr val="FFFFFF"/>
-                </a:solidFill>
-                <a:latin typeface="Arial" pitchFamily="34" charset="0"/>
-                <a:ea typeface="Arial" pitchFamily="34" charset="-122"/>
-                <a:cs typeface="Arial" pitchFamily="34" charset="-120"/>
-              </a:rPr>
-              <a:t>High-Lift Hierarchical Segments</a:t>
+              <a:t>WHITEBOX RULE MINING ENGINE</a:t>
             </a:r>
             <a:endParaRPr lang="en-US" sz="3600" dirty="0"/>
           </a:p>
@@ -17601,7 +17644,7 @@
           <a:bodyPr/>
           <a:lstStyle/>
           <a:p>
-            <a:endParaRPr lang="en-IN"/>
+            <a:endParaRPr lang="en-IN" dirty="0"/>
           </a:p>
         </p:txBody>
       </p:sp>
@@ -17741,42 +17784,6 @@
               <a:t>features enter the search</a:t>
             </a:r>
             <a:endParaRPr lang="en-US" sz="1300" dirty="0"/>
-          </a:p>
-        </p:txBody>
-      </p:sp>
-      <p:sp>
-        <p:nvSpPr>
-          <p:cNvPr id="9" name="Text 7"/>
-          <p:cNvSpPr/>
-          <p:nvPr/>
-        </p:nvSpPr>
-        <p:spPr>
-          <a:xfrm>
-            <a:off x="3154680" y="2103120"/>
-            <a:ext cx="274320" cy="365760"/>
-          </a:xfrm>
-          <a:prstGeom prst="rect">
-            <a:avLst/>
-          </a:prstGeom>
-          <a:noFill/>
-          <a:ln/>
-        </p:spPr>
-        <p:txBody>
-          <a:bodyPr wrap="square" lIns="0" tIns="0" rIns="0" bIns="0" rtlCol="0" anchor="ctr"/>
-          <a:lstStyle/>
-          <a:p>
-            <a:pPr marL="0" indent="0">
-              <a:buNone/>
-            </a:pPr>
-            <a:r>
-              <a:rPr lang="en-US" sz="2000" dirty="0">
-                <a:solidFill>
-                  <a:srgbClr val="DB0011"/>
-                </a:solidFill>
-              </a:rPr>
-              <a:t>→</a:t>
-            </a:r>
-            <a:endParaRPr lang="en-US" sz="2000" dirty="0"/>
           </a:p>
         </p:txBody>
       </p:sp>
@@ -17960,42 +17967,6 @@
       </p:sp>
       <p:sp>
         <p:nvSpPr>
-          <p:cNvPr id="14" name="Text 12"/>
-          <p:cNvSpPr/>
-          <p:nvPr/>
-        </p:nvSpPr>
-        <p:spPr>
-          <a:xfrm>
-            <a:off x="6035040" y="2103120"/>
-            <a:ext cx="274320" cy="365760"/>
-          </a:xfrm>
-          <a:prstGeom prst="rect">
-            <a:avLst/>
-          </a:prstGeom>
-          <a:noFill/>
-          <a:ln/>
-        </p:spPr>
-        <p:txBody>
-          <a:bodyPr wrap="square" lIns="0" tIns="0" rIns="0" bIns="0" rtlCol="0" anchor="ctr"/>
-          <a:lstStyle/>
-          <a:p>
-            <a:pPr marL="0" indent="0">
-              <a:buNone/>
-            </a:pPr>
-            <a:r>
-              <a:rPr lang="en-US" sz="2000" dirty="0">
-                <a:solidFill>
-                  <a:srgbClr val="DB0011"/>
-                </a:solidFill>
-              </a:rPr>
-              <a:t>→</a:t>
-            </a:r>
-            <a:endParaRPr lang="en-US" sz="2000" dirty="0"/>
-          </a:p>
-        </p:txBody>
-      </p:sp>
-      <p:sp>
-        <p:nvSpPr>
           <p:cNvPr id="15" name="Shape 13"/>
           <p:cNvSpPr/>
           <p:nvPr/>
@@ -18174,42 +18145,6 @@
       </p:sp>
       <p:sp>
         <p:nvSpPr>
-          <p:cNvPr id="19" name="Text 17"/>
-          <p:cNvSpPr/>
-          <p:nvPr/>
-        </p:nvSpPr>
-        <p:spPr>
-          <a:xfrm>
-            <a:off x="8915400" y="2103120"/>
-            <a:ext cx="274320" cy="365760"/>
-          </a:xfrm>
-          <a:prstGeom prst="rect">
-            <a:avLst/>
-          </a:prstGeom>
-          <a:noFill/>
-          <a:ln/>
-        </p:spPr>
-        <p:txBody>
-          <a:bodyPr wrap="square" lIns="0" tIns="0" rIns="0" bIns="0" rtlCol="0" anchor="ctr"/>
-          <a:lstStyle/>
-          <a:p>
-            <a:pPr marL="0" indent="0">
-              <a:buNone/>
-            </a:pPr>
-            <a:r>
-              <a:rPr lang="en-US" sz="2000" dirty="0">
-                <a:solidFill>
-                  <a:srgbClr val="DB0011"/>
-                </a:solidFill>
-              </a:rPr>
-              <a:t>→</a:t>
-            </a:r>
-            <a:endParaRPr lang="en-US" sz="2000" dirty="0"/>
-          </a:p>
-        </p:txBody>
-      </p:sp>
-      <p:sp>
-        <p:nvSpPr>
           <p:cNvPr id="20" name="Shape 18"/>
           <p:cNvSpPr/>
           <p:nvPr/>
@@ -18857,6 +18792,114 @@
           </a:p>
         </p:txBody>
       </p:sp>
+      <p:pic>
+        <p:nvPicPr>
+          <p:cNvPr id="37" name="Graphic 36" descr="Line arrow: Straight with solid fill">
+            <a:extLst>
+              <a:ext uri="{FF2B5EF4-FFF2-40B4-BE49-F238E27FC236}">
+                <a16:creationId xmlns:a16="http://schemas.microsoft.com/office/drawing/2014/main" id="{72050600-8D5A-C653-1041-2AA744098F38}"/>
+              </a:ext>
+            </a:extLst>
+          </p:cNvPr>
+          <p:cNvPicPr>
+            <a:picLocks noChangeAspect="1"/>
+          </p:cNvPicPr>
+          <p:nvPr/>
+        </p:nvPicPr>
+        <p:blipFill>
+          <a:blip>
+            <a:extLst>
+              <a:ext uri="{96DAC541-7B7A-43D3-8B79-37D633B846F1}">
+                <asvg:svgBlip xmlns:asvg="http://schemas.microsoft.com/office/drawing/2016/SVG/main" r:embed="rId4"/>
+              </a:ext>
+            </a:extLst>
+          </a:blip>
+          <a:stretch>
+            <a:fillRect/>
+          </a:stretch>
+        </p:blipFill>
+        <p:spPr>
+          <a:xfrm rot="10800000">
+            <a:off x="3053936" y="2258488"/>
+            <a:ext cx="466504" cy="466504"/>
+          </a:xfrm>
+          <a:prstGeom prst="rect">
+            <a:avLst/>
+          </a:prstGeom>
+        </p:spPr>
+      </p:pic>
+      <p:pic>
+        <p:nvPicPr>
+          <p:cNvPr id="39" name="Graphic 38" descr="Line arrow: Straight with solid fill">
+            <a:extLst>
+              <a:ext uri="{FF2B5EF4-FFF2-40B4-BE49-F238E27FC236}">
+                <a16:creationId xmlns:a16="http://schemas.microsoft.com/office/drawing/2014/main" id="{EB87832B-FDD5-FAF9-364A-178C6EBC56D8}"/>
+              </a:ext>
+            </a:extLst>
+          </p:cNvPr>
+          <p:cNvPicPr>
+            <a:picLocks noChangeAspect="1"/>
+          </p:cNvPicPr>
+          <p:nvPr/>
+        </p:nvPicPr>
+        <p:blipFill>
+          <a:blip>
+            <a:extLst>
+              <a:ext uri="{96DAC541-7B7A-43D3-8B79-37D633B846F1}">
+                <asvg:svgBlip xmlns:asvg="http://schemas.microsoft.com/office/drawing/2016/SVG/main" r:embed="rId4"/>
+              </a:ext>
+            </a:extLst>
+          </a:blip>
+          <a:stretch>
+            <a:fillRect/>
+          </a:stretch>
+        </p:blipFill>
+        <p:spPr>
+          <a:xfrm rot="10800000">
+            <a:off x="5902545" y="2238440"/>
+            <a:ext cx="466504" cy="466504"/>
+          </a:xfrm>
+          <a:prstGeom prst="rect">
+            <a:avLst/>
+          </a:prstGeom>
+        </p:spPr>
+      </p:pic>
+      <p:pic>
+        <p:nvPicPr>
+          <p:cNvPr id="41" name="Graphic 40" descr="Line arrow: Straight with solid fill">
+            <a:extLst>
+              <a:ext uri="{FF2B5EF4-FFF2-40B4-BE49-F238E27FC236}">
+                <a16:creationId xmlns:a16="http://schemas.microsoft.com/office/drawing/2014/main" id="{83D2AF76-1CBC-2D73-5205-2BFE51B58BFC}"/>
+              </a:ext>
+            </a:extLst>
+          </p:cNvPr>
+          <p:cNvPicPr>
+            <a:picLocks noChangeAspect="1"/>
+          </p:cNvPicPr>
+          <p:nvPr/>
+        </p:nvPicPr>
+        <p:blipFill>
+          <a:blip>
+            <a:extLst>
+              <a:ext uri="{96DAC541-7B7A-43D3-8B79-37D633B846F1}">
+                <asvg:svgBlip xmlns:asvg="http://schemas.microsoft.com/office/drawing/2016/SVG/main" r:embed="rId4"/>
+              </a:ext>
+            </a:extLst>
+          </a:blip>
+          <a:stretch>
+            <a:fillRect/>
+          </a:stretch>
+        </p:blipFill>
+        <p:spPr>
+          <a:xfrm rot="10800000">
+            <a:off x="8814656" y="2203463"/>
+            <a:ext cx="466504" cy="466504"/>
+          </a:xfrm>
+          <a:prstGeom prst="rect">
+            <a:avLst/>
+          </a:prstGeom>
+        </p:spPr>
+      </p:pic>
     </p:spTree>
   </p:cSld>
   <p:clrMapOvr>
